--- a/산출물/통합반/이론_오프라인/04회차/통합반_오프라인_04회차.pptx
+++ b/산출물/통합반/이론_오프라인/04회차/통합반_오프라인_04회차.pptx
@@ -952,7 +952,7 @@
           </a:p>
           <a:p>
             <a:r>
-              <a:t>[다음] 4단계 매핑: 새로 만들 것과 가리킬 것</a:t>
+              <a:t>[다음] 4단계 매핑</a:t>
             </a:r>
           </a:p>
         </p:txBody>
@@ -1052,7 +1052,7 @@
           </a:p>
           <a:p>
             <a:r>
-              <a:t>[다음] 맞는 대상이 없을 때: 지어내지 않고 경고로 남긴다</a:t>
+              <a:t>[다음] 맞는 대상이 없을 때</a:t>
             </a:r>
           </a:p>
         </p:txBody>
@@ -1337,7 +1337,7 @@
           </a:p>
           <a:p>
             <a:r>
-              <a:t>[다음] 실제로 기록된 오류: 조건을 값에 미리 적용한 추출</a:t>
+              <a:t>[다음] 실제로 기록된 오류</a:t>
             </a:r>
           </a:p>
         </p:txBody>
@@ -1432,7 +1432,7 @@
           </a:p>
           <a:p>
             <a:r>
-              <a:t>[다음] 5단계 근거 대조: 인용과 원문 위치</a:t>
+              <a:t>[다음] 5단계 근거 대조</a:t>
             </a:r>
           </a:p>
         </p:txBody>
@@ -2012,7 +2012,7 @@
           </a:p>
           <a:p>
             <a:r>
-              <a:t>[다음] 7단계 관계 · 출처 조회: 조치에서 근거 문서까지</a:t>
+              <a:t>[다음] 7단계 관계 · 출처 조회</a:t>
             </a:r>
           </a:p>
         </p:txBody>
@@ -2857,7 +2857,7 @@
           </a:p>
           <a:p>
             <a:r>
-              <a:t>[다음] 1단계 원문 보관: 고정된 원문과 문서 식별자</a:t>
+              <a:t>[다음] 1단계 원문 보관</a:t>
             </a:r>
           </a:p>
         </p:txBody>
@@ -2957,7 +2957,7 @@
           </a:p>
           <a:p>
             <a:r>
-              <a:t>[다음] 2단계 문서 내용 분석: 절 · 절차 · 단계</a:t>
+              <a:t>[다음] 2단계 문서 내용 분석</a:t>
             </a:r>
           </a:p>
         </p:txBody>
@@ -15622,7 +15622,7 @@
       </p:sp>
       <p:pic>
         <p:nvPicPr>
-          <p:cNvPr id="6" name="삽화:인용.svg" descr="illust_184472582540316336_1793113376.png"/>
+          <p:cNvPr id="6" name="삽화:인용.svg" descr="illust_3373745816965353293_1793113376.png"/>
           <p:cNvPicPr>
             <a:picLocks noChangeAspect="1"/>
           </p:cNvPicPr>
@@ -18615,7 +18615,7 @@
       </p:sp>
       <p:pic>
         <p:nvPicPr>
-          <p:cNvPr id="6" name="삽화:인제스천_6.svg" descr="illust_2121106957115307679_1793113376.png"/>
+          <p:cNvPr id="6" name="삽화:인제스천_6.svg" descr="illust_6473516176624841383_1793113376.png"/>
           <p:cNvPicPr>
             <a:picLocks noChangeAspect="1"/>
           </p:cNvPicPr>
@@ -19127,7 +19127,7 @@
       </p:sp>
       <p:pic>
         <p:nvPicPr>
-          <p:cNvPr id="6" name="삽화:적재묶음_사슬.svg" descr="illust_2614890810311410854_1793113376.png"/>
+          <p:cNvPr id="6" name="삽화:적재묶음_사슬.svg" descr="illust_7831320987666006838_1793113376.png"/>
           <p:cNvPicPr>
             <a:picLocks noChangeAspect="1"/>
           </p:cNvPicPr>
@@ -25217,7 +25217,7 @@
       </p:sp>
       <p:pic>
         <p:nvPicPr>
-          <p:cNvPr id="6" name="삽화:인제스천_전체.svg" descr="illust_9153711177972854895_1793113376.png"/>
+          <p:cNvPr id="6" name="삽화:인제스천_전체.svg" descr="illust_7829960626589922500_1793113376.png"/>
           <p:cNvPicPr>
             <a:picLocks noChangeAspect="1"/>
           </p:cNvPicPr>

--- a/산출물/통합반/이론_오프라인/04회차/통합반_오프라인_04회차.pptx
+++ b/산출물/통합반/이론_오프라인/04회차/통합반_오프라인_04회차.pptx
@@ -552,11 +552,6 @@
           </a:p>
           <a:p>
             <a:r>
-              <a:t>· 이론은 온라인 교재의 인제스천 장에서 오늘 실습에 쓰는 것만</a:t>
-            </a:r>
-          </a:p>
-          <a:p>
-            <a:r>
               <a:t>[다음] 학습목표</a:t>
             </a:r>
           </a:p>
@@ -637,7 +632,7 @@
           </a:p>
           <a:p>
             <a:r>
-              <a:t>· 실습에서 원문의 조건 · 단위 · 금지 사항 · 근거 절을 뽑는 기능을 직접 만든다 → 이 단원이 그 설계</a:t>
+              <a:t>· 원문 고정 → 절 구조 분석 → LLM 추출과 정해진 형식 → 기존 대상에 잇기 차례로</a:t>
             </a:r>
           </a:p>
           <a:p>
@@ -1042,7 +1037,7 @@
           </a:p>
           <a:p>
             <a:r>
-              <a:t>· 지시만으로 보장되지 않는다: 프롬프트 인젝션. 필요한 권한만, 결과 검사, 중요한 반영은 별도 검토</a:t>
+              <a:t>· 지시만으로 보장되지 않는다: 문서에 숨은 지시가 모델을 움직이는 공격(프롬프트 인젝션). 필요한 권한만, 결과 검사, 중요한 반영은 별도 검토</a:t>
             </a:r>
           </a:p>
           <a:p>
@@ -1527,6 +1522,11 @@
           </a:p>
           <a:p>
             <a:r>
+              <a:t>· 단계 순서 오류도 같다: SOP-COOL-11의 1 「운전 모드 확인」과 2 「팬 100 %」가 뒤바뀌어 옮겨지면 모드를 보기 전에 팬을 올리는 절차가 된다 → 단계 번호를 원문과 대조</a:t>
+            </a:r>
+          </a:p>
+          <a:p>
+            <a:r>
               <a:t>· 공통점: 넷 모두 형식 검사를 통과한다 → 원문과 나란히 대조해야 드러난다</a:t>
             </a:r>
           </a:p>
@@ -1612,7 +1612,7 @@
           </a:p>
           <a:p>
             <a:r>
-              <a:t>· 2 추출과 매핑: 뜻은 LLM이 읽고, 결과는 정한 모양으로, 이미 있는 대상은 식별자로(이어지는 추출 실습)</a:t>
+              <a:t>· 2 추출과 매핑: 뜻은 LLM이 읽고, 결과는 정한 모양으로, 이미 있는 대상은 식별자로</a:t>
             </a:r>
           </a:p>
           <a:p>
@@ -2577,7 +2577,7 @@
           </a:p>
           <a:p>
             <a:r>
-              <a:t>· 역량 질문 예: 「팬 최대 운전의 절차와 제한은? 근거는?」 넣기 전에 원문에서 기대 답(조건 · 단계 · 근거 절)을 정한다. 수행 조건 REMOTE_AUTO와 연속 운전 제한 24시간도 나와야 한다</a:t>
+              <a:t>· 역량 질문 = 이 지식이 답해야 할 질문을 미리 정해 둔 것, 설계 · 검증의 기준. 예: 「팬 최대 운전의 절차와 제한은? 근거는?」 넣기 전에 원문에서 기대 답(조건 · 단계 · 근거 절)을 정한다. 수행 조건 REMOTE_AUTO와 연속 운전 제한 24시간도 나와야 한다</a:t>
             </a:r>
           </a:p>
           <a:p>
@@ -2588,16 +2588,6 @@
           <a:p>
             <a:r>
               <a:t>· 진단: 관계가 없으면 스키마, 관계는 있는데 내용이 없으면 추출 · 매핑 · 적재, 내용도 있는데 놓치면 질의 경로 → 고친 뒤 같은 질문으로 재검증</a:t>
-            </a:r>
-          </a:p>
-          <a:p>
-            <a:r>
-              <a:t>· 골든 퀘스천 기능: 문서 적재로 답할 수 있어야 할 질문에 답/일부/미답을 근거와 보고. 정답 보증은 아니다 — 기대 답과 원문으로 대조</a:t>
-            </a:r>
-          </a:p>
-          <a:p>
-            <a:r>
-              <a:t>· 역량 질문은 설계 · 검증의 기준, 골든 퀘스천 기능은 확인을 돕는 수단. 그래프 반영 실습의 성공 기준</a:t>
             </a:r>
           </a:p>
           <a:p>
@@ -18934,7 +18924,7 @@
       </p:sp>
       <p:pic>
         <p:nvPicPr>
-          <p:cNvPr id="6" name="삽화:인용.svg" descr="illust_3337104755902496186_1793113376.png"/>
+          <p:cNvPr id="6" name="삽화:인용.svg" descr="illust_6798072271538415729_1793113376.png"/>
           <p:cNvPicPr>
             <a:picLocks noChangeAspect="1"/>
           </p:cNvPicPr>
@@ -20795,7 +20785,7 @@
       </p:sp>
       <p:pic>
         <p:nvPicPr>
-          <p:cNvPr id="6" name="삽화:인제스천_6.svg" descr="illust_8490375458372864499_1793113376.png"/>
+          <p:cNvPr id="6" name="삽화:인제스천_6.svg" descr="illust_2034111837360471559_1793113376.png"/>
           <p:cNvPicPr>
             <a:picLocks noChangeAspect="1"/>
           </p:cNvPicPr>
@@ -21307,7 +21297,7 @@
       </p:sp>
       <p:pic>
         <p:nvPicPr>
-          <p:cNvPr id="6" name="삽화:적재묶음_사슬.svg" descr="illust_8550784992880494900_1793113376.png"/>
+          <p:cNvPr id="6" name="삽화:적재묶음_사슬.svg" descr="illust_1310606149643446850_1793113376.png"/>
           <p:cNvPicPr>
             <a:picLocks noChangeAspect="1"/>
           </p:cNvPicPr>
@@ -34994,7 +34984,7 @@
       </p:sp>
       <p:pic>
         <p:nvPicPr>
-          <p:cNvPr id="6" name="삽화:인제스천_전체.svg" descr="illust_7700177690869657253_1793113376.png"/>
+          <p:cNvPr id="6" name="삽화:인제스천_전체.svg" descr="illust_6132639459684700967_1793113376.png"/>
           <p:cNvPicPr>
             <a:picLocks noChangeAspect="1"/>
           </p:cNvPicPr>
